--- a/PRESENTATION_Skylar_LSTM.pptx
+++ b/PRESENTATION_Skylar_LSTM.pptx
@@ -17,7 +17,7 @@
     <p:sldId id="264" r:id="rId8"/>
     <p:sldId id="262" r:id="rId9"/>
     <p:sldId id="266" r:id="rId10"/>
-    <p:sldId id="265" r:id="rId11"/>
+    <p:sldId id="276" r:id="rId11"/>
     <p:sldId id="274" r:id="rId12"/>
     <p:sldId id="267" r:id="rId13"/>
     <p:sldId id="268" r:id="rId14"/>
@@ -2061,7 +2061,7 @@
           <a:p>
             <a:r>
               <a:rPr lang="en-US" dirty="0"/>
-              <a:t>Two implementation details are worth a minute. Files have different lengths, so I pad each batch and then pack it. Packing tells the LSTM where the real audio stops. The loss masks the padding as well. Without both steps the model trains on silence. Read the bottom bar for the two runs.</a:t>
+              <a:t>Now the concrete settings, straight from the config. Adam at a learning rate of 0.001, no weight decay, gradient clipped at 1.0 to stop the rare exploding gradient. The model is 256 hidden units, two layers, dropout 0.2. Batch size eight, thirty-two epochs. Two mechanics are worth explaining. Files differ in length, so each batch pads to its longest file and then packs, which tells the LSTM where real audio stops. The loss masks the padding as well, so silence adds no gradient. The output is a mask. Sigmoid gives a gain between zero and one for each frequency bin, and that gain multiplies the noisy magnitude to estimate the clean magnitude. I checkpoint on validation MSE and keep the best epoch.</a:t>
             </a:r>
           </a:p>
         </p:txBody>
@@ -8388,7 +8388,7 @@
         </p:nvSpPr>
         <p:spPr>
           <a:xfrm>
-            <a:off x="777240" y="1234440"/>
+            <a:off x="773803" y="993809"/>
             <a:ext cx="10607040" cy="1691640"/>
           </a:xfrm>
           <a:prstGeom prst="rect">
@@ -8521,12 +8521,58 @@
                 <a:ea typeface="Calibri" pitchFamily="34" charset="-122"/>
                 <a:cs typeface="Calibri" pitchFamily="34" charset="-120"/>
               </a:rPr>
-              <a:t>EECE 5644 — Machine Learning  ·  Northeastern University</a:t>
+              <a:t>EECE 5644: Machine Learning </a:t>
+            </a:r>
+          </a:p>
+          <a:p>
+            <a:pPr marL="0" indent="0">
+              <a:buNone/>
+            </a:pPr>
+            <a:r>
+              <a:rPr lang="en-US" sz="1200" dirty="0">
+                <a:solidFill>
+                  <a:srgbClr val="C9D9E8"/>
+                </a:solidFill>
+                <a:latin typeface="Calibri" pitchFamily="34" charset="0"/>
+                <a:ea typeface="Calibri" pitchFamily="34" charset="-122"/>
+                <a:cs typeface="Calibri" pitchFamily="34" charset="-120"/>
+              </a:rPr>
+              <a:t>Northeastern University</a:t>
             </a:r>
             <a:endParaRPr lang="en-US" sz="1500" dirty="0"/>
           </a:p>
         </p:txBody>
       </p:sp>
+      <p:pic>
+        <p:nvPicPr>
+          <p:cNvPr id="151" name="Picture 150" descr="Northeastern University Logo and symbol, meaning, history, PNG, brand">
+            <a:extLst>
+              <a:ext uri="{FF2B5EF4-FFF2-40B4-BE49-F238E27FC236}">
+                <a16:creationId xmlns:a16="http://schemas.microsoft.com/office/drawing/2014/main" id="{F6FB5FE3-AFC2-151C-CCAE-3923F1003BE7}"/>
+              </a:ext>
+            </a:extLst>
+          </p:cNvPr>
+          <p:cNvPicPr>
+            <a:picLocks noChangeAspect="1"/>
+          </p:cNvPicPr>
+          <p:nvPr/>
+        </p:nvPicPr>
+        <p:blipFill>
+          <a:blip r:embed="rId3"/>
+          <a:stretch>
+            <a:fillRect/>
+          </a:stretch>
+        </p:blipFill>
+        <p:spPr>
+          <a:xfrm>
+            <a:off x="7692302" y="2614973"/>
+            <a:ext cx="4545979" cy="2553325"/>
+          </a:xfrm>
+          <a:prstGeom prst="rect">
+            <a:avLst/>
+          </a:prstGeom>
+        </p:spPr>
+      </p:pic>
     </p:spTree>
   </p:cSld>
   <p:clrMapOvr>
@@ -8537,7 +8583,7 @@
 
 <file path=ppt/slides/slide10.xml><?xml version="1.0" encoding="utf-8"?>
 <p:sld xmlns:a="http://schemas.openxmlformats.org/drawingml/2006/main" xmlns:r="http://schemas.openxmlformats.org/officeDocument/2006/relationships" xmlns:p="http://schemas.openxmlformats.org/presentationml/2006/main">
-  <p:cSld name="Slide 10">
+  <p:cSld>
     <p:spTree>
       <p:nvGrpSpPr>
         <p:cNvPr id="1" name=""/>
@@ -8585,7 +8631,7 @@
                 <a:ea typeface="Calibri" pitchFamily="34" charset="-122"/>
                 <a:cs typeface="Calibri" pitchFamily="34" charset="-120"/>
               </a:rPr>
-              <a:t>STAGE 4</a:t>
+              <a:t>STAGE 4 — TRAINING</a:t>
             </a:r>
             <a:endParaRPr lang="en-US" sz="1150" dirty="0"/>
           </a:p>
@@ -8638,12 +8684,12 @@
         </p:nvSpPr>
         <p:spPr>
           <a:xfrm>
-            <a:off x="640080" y="1691640"/>
-            <a:ext cx="5285232" cy="1371600"/>
-          </a:xfrm>
-          <a:prstGeom prst="roundRect">
-            <a:avLst>
-              <a:gd name="adj" fmla="val 6000"/>
+            <a:off x="640080" y="1318950"/>
+            <a:ext cx="5349240" cy="1097280"/>
+          </a:xfrm>
+          <a:prstGeom prst="roundRect">
+            <a:avLst>
+              <a:gd name="adj" fmla="val 6818"/>
             </a:avLst>
           </a:prstGeom>
           <a:solidFill>
@@ -8679,8 +8725,8 @@
         </p:nvSpPr>
         <p:spPr>
           <a:xfrm>
-            <a:off x="877824" y="1947672"/>
-            <a:ext cx="274320" cy="274320"/>
+            <a:off x="877824" y="1514299"/>
+            <a:ext cx="274320" cy="249382"/>
           </a:xfrm>
           <a:prstGeom prst="ellipse">
             <a:avLst/>
@@ -8706,8 +8752,8 @@
         </p:nvSpPr>
         <p:spPr>
           <a:xfrm>
-            <a:off x="1280160" y="1874520"/>
-            <a:ext cx="4480560" cy="310896"/>
+            <a:off x="1280160" y="1442810"/>
+            <a:ext cx="4480560" cy="282633"/>
           </a:xfrm>
           <a:prstGeom prst="rect">
             <a:avLst/>
@@ -8723,7 +8769,7 @@
               <a:buNone/>
             </a:pPr>
             <a:r>
-              <a:rPr lang="en-US" sz="1400" b="1" dirty="0">
+              <a:rPr lang="en-US" sz="1450" b="1" dirty="0">
                 <a:solidFill>
                   <a:srgbClr val="12233A"/>
                 </a:solidFill>
@@ -8731,9 +8777,9 @@
                 <a:ea typeface="Calibri" pitchFamily="34" charset="-122"/>
                 <a:cs typeface="Calibri" pitchFamily="34" charset="-120"/>
               </a:rPr>
-              <a:t>Variable-length batching</a:t>
+              <a:t>Pad, then pack</a:t>
             </a:r>
-            <a:endParaRPr lang="en-US" sz="1400" dirty="0"/>
+            <a:endParaRPr lang="en-US" sz="1450" dirty="0"/>
           </a:p>
         </p:txBody>
       </p:sp>
@@ -8745,8 +8791,8 @@
         </p:nvSpPr>
         <p:spPr>
           <a:xfrm>
-            <a:off x="1280160" y="2221992"/>
-            <a:ext cx="4480560" cy="749808"/>
+            <a:off x="1280160" y="1805245"/>
+            <a:ext cx="4526280" cy="581891"/>
           </a:xfrm>
           <a:prstGeom prst="rect">
             <a:avLst/>
@@ -8770,7 +8816,7 @@
                 <a:ea typeface="Calibri" pitchFamily="34" charset="-122"/>
                 <a:cs typeface="Calibri" pitchFamily="34" charset="-120"/>
               </a:rPr>
-              <a:t>Pad each batch, then pack. The LSTM skips the padding.</a:t>
+              <a:t>Each batch pads to its longest file. Packing tells the LSTM where the real audio stops. A masked MSE stops the MSE from empty padding signal from being considered</a:t>
             </a:r>
             <a:endParaRPr lang="en-US" sz="1300" dirty="0"/>
           </a:p>
@@ -8784,12 +8830,12 @@
         </p:nvSpPr>
         <p:spPr>
           <a:xfrm>
-            <a:off x="6254496" y="1691640"/>
-            <a:ext cx="5285232" cy="1371600"/>
-          </a:xfrm>
-          <a:prstGeom prst="roundRect">
-            <a:avLst>
-              <a:gd name="adj" fmla="val 6000"/>
+            <a:off x="640080" y="2690550"/>
+            <a:ext cx="5349240" cy="1097280"/>
+          </a:xfrm>
+          <a:prstGeom prst="roundRect">
+            <a:avLst>
+              <a:gd name="adj" fmla="val 6818"/>
             </a:avLst>
           </a:prstGeom>
           <a:solidFill>
@@ -8825,14 +8871,14 @@
         </p:nvSpPr>
         <p:spPr>
           <a:xfrm>
-            <a:off x="6492240" y="1947672"/>
-            <a:ext cx="274320" cy="274320"/>
+            <a:off x="877824" y="2885899"/>
+            <a:ext cx="274320" cy="249382"/>
           </a:xfrm>
           <a:prstGeom prst="ellipse">
             <a:avLst/>
           </a:prstGeom>
           <a:solidFill>
-            <a:srgbClr val="E08A3C"/>
+            <a:srgbClr val="0E8A8F"/>
           </a:solidFill>
           <a:ln/>
         </p:spPr>
@@ -8852,8 +8898,8 @@
         </p:nvSpPr>
         <p:spPr>
           <a:xfrm>
-            <a:off x="6894576" y="1874520"/>
-            <a:ext cx="4480560" cy="310896"/>
+            <a:off x="1280160" y="2814410"/>
+            <a:ext cx="4480560" cy="282633"/>
           </a:xfrm>
           <a:prstGeom prst="rect">
             <a:avLst/>
@@ -8869,7 +8915,7 @@
               <a:buNone/>
             </a:pPr>
             <a:r>
-              <a:rPr lang="en-US" sz="1400" b="1" dirty="0">
+              <a:rPr lang="en-US" sz="1450" b="1" dirty="0">
                 <a:solidFill>
                   <a:srgbClr val="12233A"/>
                 </a:solidFill>
@@ -8879,7 +8925,7 @@
               </a:rPr>
               <a:t>Masked MSE loss</a:t>
             </a:r>
-            <a:endParaRPr lang="en-US" sz="1400" dirty="0"/>
+            <a:endParaRPr lang="en-US" sz="1450" dirty="0"/>
           </a:p>
         </p:txBody>
       </p:sp>
@@ -8891,8 +8937,8 @@
         </p:nvSpPr>
         <p:spPr>
           <a:xfrm>
-            <a:off x="6894576" y="2221992"/>
-            <a:ext cx="4480560" cy="749808"/>
+            <a:off x="1280160" y="3176845"/>
+            <a:ext cx="4526280" cy="581891"/>
           </a:xfrm>
           <a:prstGeom prst="rect">
             <a:avLst/>
@@ -8916,7 +8962,7 @@
                 <a:ea typeface="Calibri" pitchFamily="34" charset="-122"/>
                 <a:cs typeface="Calibri" pitchFamily="34" charset="-120"/>
               </a:rPr>
-              <a:t>The loss ignores every padded frame.</a:t>
+              <a:t>The loss ignores every padded frame, so silence adds no gradient.</a:t>
             </a:r>
             <a:endParaRPr lang="en-US" sz="1300" dirty="0"/>
           </a:p>
@@ -8930,12 +8976,137 @@
         </p:nvSpPr>
         <p:spPr>
           <a:xfrm>
-            <a:off x="640080" y="3264408"/>
-            <a:ext cx="5285232" cy="1371600"/>
+            <a:off x="640080" y="4069632"/>
+            <a:ext cx="5349240" cy="1246909"/>
           </a:xfrm>
           <a:prstGeom prst="roundRect">
             <a:avLst>
               <a:gd name="adj" fmla="val 6000"/>
+            </a:avLst>
+          </a:prstGeom>
+          <a:solidFill>
+            <a:srgbClr val="E3F2F2"/>
+          </a:solidFill>
+          <a:ln/>
+          <a:effectLst>
+            <a:outerShdw blurRad="101600" dist="12700" dir="5400000" algn="bl" rotWithShape="0">
+              <a:srgbClr val="9AA7B4">
+                <a:alpha val="18000"/>
+              </a:srgbClr>
+            </a:outerShdw>
+          </a:effectLst>
+        </p:spPr>
+        <p:txBody>
+          <a:bodyPr/>
+          <a:lstStyle/>
+          <a:p>
+            <a:endParaRPr lang="en-US"/>
+          </a:p>
+        </p:txBody>
+      </p:sp>
+      <p:sp>
+        <p:nvSpPr>
+          <p:cNvPr id="13" name="Text 11"/>
+          <p:cNvSpPr/>
+          <p:nvPr/>
+        </p:nvSpPr>
+        <p:spPr>
+          <a:xfrm>
+            <a:off x="877824" y="4156084"/>
+            <a:ext cx="4846320" cy="232756"/>
+          </a:xfrm>
+          <a:prstGeom prst="rect">
+            <a:avLst/>
+          </a:prstGeom>
+          <a:noFill/>
+          <a:ln/>
+        </p:spPr>
+        <p:txBody>
+          <a:bodyPr wrap="square" lIns="0" tIns="0" rIns="0" bIns="0" rtlCol="0" anchor="ctr"/>
+          <a:lstStyle/>
+          <a:p>
+            <a:pPr marL="0" indent="0">
+              <a:buNone/>
+            </a:pPr>
+            <a:r>
+              <a:rPr lang="en-US" sz="1100" b="1" kern="0" spc="100" dirty="0">
+                <a:solidFill>
+                  <a:srgbClr val="0E8A8F"/>
+                </a:solidFill>
+                <a:latin typeface="Calibri" pitchFamily="34" charset="0"/>
+                <a:ea typeface="Calibri" pitchFamily="34" charset="-122"/>
+                <a:cs typeface="Calibri" pitchFamily="34" charset="-120"/>
+              </a:rPr>
+              <a:t>What the model outputs</a:t>
+            </a:r>
+            <a:endParaRPr lang="en-US" sz="1100" dirty="0"/>
+          </a:p>
+        </p:txBody>
+      </p:sp>
+      <p:sp>
+        <p:nvSpPr>
+          <p:cNvPr id="14" name="Text 12"/>
+          <p:cNvSpPr/>
+          <p:nvPr/>
+        </p:nvSpPr>
+        <p:spPr>
+          <a:xfrm>
+            <a:off x="877824" y="4485684"/>
+            <a:ext cx="4846320" cy="789709"/>
+          </a:xfrm>
+          <a:prstGeom prst="rect">
+            <a:avLst/>
+          </a:prstGeom>
+          <a:noFill/>
+          <a:ln/>
+        </p:spPr>
+        <p:txBody>
+          <a:bodyPr wrap="square" lIns="0" tIns="0" rIns="0" bIns="0" rtlCol="0" anchor="t"/>
+          <a:lstStyle/>
+          <a:p>
+            <a:pPr marL="0" indent="0">
+              <a:buNone/>
+            </a:pPr>
+            <a:r>
+              <a:rPr lang="en-US" sz="1300" b="1" dirty="0">
+                <a:solidFill>
+                  <a:srgbClr val="12233A"/>
+                </a:solidFill>
+                <a:latin typeface="Calibri" pitchFamily="34" charset="0"/>
+                <a:ea typeface="Calibri" pitchFamily="34" charset="-122"/>
+                <a:cs typeface="Calibri" pitchFamily="34" charset="-120"/>
+              </a:rPr>
+              <a:t>An IRM mask.</a:t>
+            </a:r>
+            <a:r>
+              <a:rPr lang="en-US" sz="1300" dirty="0">
+                <a:solidFill>
+                  <a:srgbClr val="12233A"/>
+                </a:solidFill>
+                <a:latin typeface="Calibri" pitchFamily="34" charset="0"/>
+                <a:ea typeface="Calibri" pitchFamily="34" charset="-122"/>
+                <a:cs typeface="Calibri" pitchFamily="34" charset="-120"/>
+              </a:rPr>
+              <a:t>  Sigmoid gives a 0-1 gain per bin. The gain multiplies the noisy magnitude to estimate the clean one.</a:t>
+            </a:r>
+            <a:endParaRPr lang="en-US" sz="1300" dirty="0"/>
+          </a:p>
+        </p:txBody>
+      </p:sp>
+      <p:sp>
+        <p:nvSpPr>
+          <p:cNvPr id="15" name="Shape 13"/>
+          <p:cNvSpPr/>
+          <p:nvPr/>
+        </p:nvSpPr>
+        <p:spPr>
+          <a:xfrm>
+            <a:off x="6172200" y="1451123"/>
+            <a:ext cx="5367528" cy="3740727"/>
+          </a:xfrm>
+          <a:prstGeom prst="roundRect">
+            <a:avLst>
+              <a:gd name="adj" fmla="val 2000"/>
             </a:avLst>
           </a:prstGeom>
           <a:solidFill>
@@ -8965,41 +9136,14 @@
       </p:sp>
       <p:sp>
         <p:nvSpPr>
-          <p:cNvPr id="13" name="Shape 11"/>
-          <p:cNvSpPr/>
-          <p:nvPr/>
-        </p:nvSpPr>
-        <p:spPr>
-          <a:xfrm>
-            <a:off x="877824" y="3520440"/>
-            <a:ext cx="274320" cy="274320"/>
-          </a:xfrm>
-          <a:prstGeom prst="ellipse">
-            <a:avLst/>
-          </a:prstGeom>
-          <a:solidFill>
-            <a:srgbClr val="0E8A8F"/>
-          </a:solidFill>
-          <a:ln/>
-        </p:spPr>
-        <p:txBody>
-          <a:bodyPr/>
-          <a:lstStyle/>
-          <a:p>
-            <a:endParaRPr lang="en-US"/>
-          </a:p>
-        </p:txBody>
-      </p:sp>
-      <p:sp>
-        <p:nvSpPr>
-          <p:cNvPr id="14" name="Text 12"/>
-          <p:cNvSpPr/>
-          <p:nvPr/>
-        </p:nvSpPr>
-        <p:spPr>
-          <a:xfrm>
-            <a:off x="1280160" y="3447288"/>
-            <a:ext cx="4480560" cy="310896"/>
+          <p:cNvPr id="16" name="Text 14"/>
+          <p:cNvSpPr/>
+          <p:nvPr/>
+        </p:nvSpPr>
+        <p:spPr>
+          <a:xfrm>
+            <a:off x="6446520" y="1459435"/>
+            <a:ext cx="4846320" cy="249382"/>
           </a:xfrm>
           <a:prstGeom prst="rect">
             <a:avLst/>
@@ -9015,30 +9159,30 @@
               <a:buNone/>
             </a:pPr>
             <a:r>
-              <a:rPr lang="en-US" sz="1400" b="1" dirty="0">
+              <a:rPr lang="en-US" sz="1150" b="1" kern="0" spc="100" dirty="0">
                 <a:solidFill>
-                  <a:srgbClr val="12233A"/>
+                  <a:srgbClr val="0E8A8F"/>
                 </a:solidFill>
                 <a:latin typeface="Calibri" pitchFamily="34" charset="0"/>
                 <a:ea typeface="Calibri" pitchFamily="34" charset="-122"/>
                 <a:cs typeface="Calibri" pitchFamily="34" charset="-120"/>
               </a:rPr>
-              <a:t>Adam optimizer, to shorten training time by </a:t>
+              <a:t>Settings  ·  4_train.yaml</a:t>
             </a:r>
-            <a:endParaRPr lang="en-US" sz="1400" dirty="0"/>
-          </a:p>
-        </p:txBody>
-      </p:sp>
-      <p:sp>
-        <p:nvSpPr>
-          <p:cNvPr id="15" name="Text 13"/>
-          <p:cNvSpPr/>
-          <p:nvPr/>
-        </p:nvSpPr>
-        <p:spPr>
-          <a:xfrm>
-            <a:off x="1280160" y="3794760"/>
-            <a:ext cx="4480560" cy="749808"/>
+            <a:endParaRPr lang="en-US" sz="1150" dirty="0"/>
+          </a:p>
+        </p:txBody>
+      </p:sp>
+      <p:sp>
+        <p:nvSpPr>
+          <p:cNvPr id="17" name="Text 15"/>
+          <p:cNvSpPr/>
+          <p:nvPr/>
+        </p:nvSpPr>
+        <p:spPr>
+          <a:xfrm>
+            <a:off x="6446520" y="1875903"/>
+            <a:ext cx="2331720" cy="349135"/>
           </a:xfrm>
           <a:prstGeom prst="rect">
             <a:avLst/>
@@ -9047,14 +9191,14 @@
           <a:ln/>
         </p:spPr>
         <p:txBody>
-          <a:bodyPr wrap="square" lIns="0" tIns="0" rIns="0" bIns="0" rtlCol="0" anchor="t"/>
+          <a:bodyPr wrap="square" lIns="0" tIns="0" rIns="0" bIns="0" rtlCol="0" anchor="ctr"/>
           <a:lstStyle/>
           <a:p>
             <a:pPr marL="0" indent="0">
               <a:buNone/>
             </a:pPr>
             <a:r>
-              <a:rPr lang="en-US" sz="1300" dirty="0">
+              <a:rPr lang="en-US" sz="1350" dirty="0">
                 <a:solidFill>
                   <a:srgbClr val="62707F"/>
                 </a:solidFill>
@@ -9062,7 +9206,46 @@
                 <a:ea typeface="Calibri" pitchFamily="34" charset="-122"/>
                 <a:cs typeface="Calibri" pitchFamily="34" charset="-120"/>
               </a:rPr>
-              <a:t>Validate each epoch. Keep the best checkpoint.</a:t>
+              <a:t>Optimizer</a:t>
+            </a:r>
+            <a:endParaRPr lang="en-US" sz="1350" dirty="0"/>
+          </a:p>
+        </p:txBody>
+      </p:sp>
+      <p:sp>
+        <p:nvSpPr>
+          <p:cNvPr id="18" name="Text 16"/>
+          <p:cNvSpPr/>
+          <p:nvPr/>
+        </p:nvSpPr>
+        <p:spPr>
+          <a:xfrm>
+            <a:off x="8778240" y="1875903"/>
+            <a:ext cx="2651760" cy="349135"/>
+          </a:xfrm>
+          <a:prstGeom prst="rect">
+            <a:avLst/>
+          </a:prstGeom>
+          <a:noFill/>
+          <a:ln/>
+        </p:spPr>
+        <p:txBody>
+          <a:bodyPr wrap="square" lIns="0" tIns="0" rIns="0" bIns="0" rtlCol="0" anchor="ctr"/>
+          <a:lstStyle/>
+          <a:p>
+            <a:pPr marL="0" indent="0">
+              <a:buNone/>
+            </a:pPr>
+            <a:r>
+              <a:rPr lang="en-US" sz="1300" b="1" dirty="0">
+                <a:solidFill>
+                  <a:srgbClr val="12233A"/>
+                </a:solidFill>
+                <a:latin typeface="Courier New" pitchFamily="34" charset="0"/>
+                <a:ea typeface="Courier New" pitchFamily="34" charset="-122"/>
+                <a:cs typeface="Courier New" pitchFamily="34" charset="-120"/>
+              </a:rPr>
+              <a:t>Adam</a:t>
             </a:r>
             <a:endParaRPr lang="en-US" sz="1300" dirty="0"/>
           </a:p>
@@ -9070,29 +9253,887 @@
       </p:sp>
       <p:sp>
         <p:nvSpPr>
-          <p:cNvPr id="16" name="Shape 14"/>
-          <p:cNvSpPr/>
-          <p:nvPr/>
-        </p:nvSpPr>
-        <p:spPr>
-          <a:xfrm>
-            <a:off x="6254496" y="3264408"/>
-            <a:ext cx="5285232" cy="1371600"/>
-          </a:xfrm>
-          <a:prstGeom prst="roundRect">
-            <a:avLst>
-              <a:gd name="adj" fmla="val 6000"/>
-            </a:avLst>
-          </a:prstGeom>
-          <a:solidFill>
-            <a:srgbClr val="FFFFFF"/>
-          </a:solidFill>
+          <p:cNvPr id="19" name="Shape 17"/>
+          <p:cNvSpPr/>
+          <p:nvPr/>
+        </p:nvSpPr>
+        <p:spPr>
+          <a:xfrm>
+            <a:off x="6446520" y="2242494"/>
+            <a:ext cx="4818888" cy="0"/>
+          </a:xfrm>
+          <a:prstGeom prst="line">
+            <a:avLst/>
+          </a:prstGeom>
+          <a:noFill/>
           <a:ln w="12700">
             <a:solidFill>
               <a:srgbClr val="DFE5EB"/>
             </a:solidFill>
             <a:prstDash val="solid"/>
           </a:ln>
+        </p:spPr>
+        <p:txBody>
+          <a:bodyPr/>
+          <a:lstStyle/>
+          <a:p>
+            <a:endParaRPr lang="en-US"/>
+          </a:p>
+        </p:txBody>
+      </p:sp>
+      <p:sp>
+        <p:nvSpPr>
+          <p:cNvPr id="20" name="Text 18"/>
+          <p:cNvSpPr/>
+          <p:nvPr/>
+        </p:nvSpPr>
+        <p:spPr>
+          <a:xfrm>
+            <a:off x="6446520" y="2259951"/>
+            <a:ext cx="2331720" cy="349135"/>
+          </a:xfrm>
+          <a:prstGeom prst="rect">
+            <a:avLst/>
+          </a:prstGeom>
+          <a:noFill/>
+          <a:ln/>
+        </p:spPr>
+        <p:txBody>
+          <a:bodyPr wrap="square" lIns="0" tIns="0" rIns="0" bIns="0" rtlCol="0" anchor="ctr"/>
+          <a:lstStyle/>
+          <a:p>
+            <a:pPr marL="0" indent="0">
+              <a:buNone/>
+            </a:pPr>
+            <a:r>
+              <a:rPr lang="en-US" sz="1350" dirty="0">
+                <a:solidFill>
+                  <a:srgbClr val="62707F"/>
+                </a:solidFill>
+                <a:latin typeface="Calibri" pitchFamily="34" charset="0"/>
+                <a:ea typeface="Calibri" pitchFamily="34" charset="-122"/>
+                <a:cs typeface="Calibri" pitchFamily="34" charset="-120"/>
+              </a:rPr>
+              <a:t>Learning rate</a:t>
+            </a:r>
+            <a:endParaRPr lang="en-US" sz="1350" dirty="0"/>
+          </a:p>
+        </p:txBody>
+      </p:sp>
+      <p:sp>
+        <p:nvSpPr>
+          <p:cNvPr id="21" name="Text 19"/>
+          <p:cNvSpPr/>
+          <p:nvPr/>
+        </p:nvSpPr>
+        <p:spPr>
+          <a:xfrm>
+            <a:off x="8778240" y="2259951"/>
+            <a:ext cx="2651760" cy="349135"/>
+          </a:xfrm>
+          <a:prstGeom prst="rect">
+            <a:avLst/>
+          </a:prstGeom>
+          <a:noFill/>
+          <a:ln/>
+        </p:spPr>
+        <p:txBody>
+          <a:bodyPr wrap="square" lIns="0" tIns="0" rIns="0" bIns="0" rtlCol="0" anchor="ctr"/>
+          <a:lstStyle/>
+          <a:p>
+            <a:pPr marL="0" indent="0">
+              <a:buNone/>
+            </a:pPr>
+            <a:r>
+              <a:rPr lang="en-US" sz="1200" b="1" dirty="0">
+                <a:solidFill>
+                  <a:srgbClr val="12233A"/>
+                </a:solidFill>
+                <a:latin typeface="Courier New" pitchFamily="34" charset="0"/>
+                <a:ea typeface="Courier New" pitchFamily="34" charset="-122"/>
+                <a:cs typeface="Courier New" pitchFamily="34" charset="-120"/>
+              </a:rPr>
+              <a:t>[Hyperparameter]</a:t>
+            </a:r>
+            <a:endParaRPr lang="en-US" sz="1200" dirty="0"/>
+          </a:p>
+        </p:txBody>
+      </p:sp>
+      <p:sp>
+        <p:nvSpPr>
+          <p:cNvPr id="22" name="Shape 20"/>
+          <p:cNvSpPr/>
+          <p:nvPr/>
+        </p:nvSpPr>
+        <p:spPr>
+          <a:xfrm>
+            <a:off x="6446520" y="2626542"/>
+            <a:ext cx="4818888" cy="0"/>
+          </a:xfrm>
+          <a:prstGeom prst="line">
+            <a:avLst/>
+          </a:prstGeom>
+          <a:noFill/>
+          <a:ln w="12700">
+            <a:solidFill>
+              <a:srgbClr val="DFE5EB"/>
+            </a:solidFill>
+            <a:prstDash val="solid"/>
+          </a:ln>
+        </p:spPr>
+        <p:txBody>
+          <a:bodyPr/>
+          <a:lstStyle/>
+          <a:p>
+            <a:endParaRPr lang="en-US"/>
+          </a:p>
+        </p:txBody>
+      </p:sp>
+      <p:sp>
+        <p:nvSpPr>
+          <p:cNvPr id="23" name="Text 21"/>
+          <p:cNvSpPr/>
+          <p:nvPr/>
+        </p:nvSpPr>
+        <p:spPr>
+          <a:xfrm>
+            <a:off x="6446520" y="2643999"/>
+            <a:ext cx="2331720" cy="349135"/>
+          </a:xfrm>
+          <a:prstGeom prst="rect">
+            <a:avLst/>
+          </a:prstGeom>
+          <a:noFill/>
+          <a:ln/>
+        </p:spPr>
+        <p:txBody>
+          <a:bodyPr wrap="square" lIns="0" tIns="0" rIns="0" bIns="0" rtlCol="0" anchor="ctr"/>
+          <a:lstStyle/>
+          <a:p>
+            <a:pPr marL="0" indent="0">
+              <a:buNone/>
+            </a:pPr>
+            <a:r>
+              <a:rPr lang="en-US" sz="1350" dirty="0">
+                <a:solidFill>
+                  <a:srgbClr val="62707F"/>
+                </a:solidFill>
+                <a:latin typeface="Calibri" pitchFamily="34" charset="0"/>
+                <a:ea typeface="Calibri" pitchFamily="34" charset="-122"/>
+                <a:cs typeface="Calibri" pitchFamily="34" charset="-120"/>
+              </a:rPr>
+              <a:t>Weight decay</a:t>
+            </a:r>
+            <a:endParaRPr lang="en-US" sz="1350" dirty="0"/>
+          </a:p>
+        </p:txBody>
+      </p:sp>
+      <p:sp>
+        <p:nvSpPr>
+          <p:cNvPr id="24" name="Text 22"/>
+          <p:cNvSpPr/>
+          <p:nvPr/>
+        </p:nvSpPr>
+        <p:spPr>
+          <a:xfrm>
+            <a:off x="8778240" y="2643999"/>
+            <a:ext cx="2651760" cy="349135"/>
+          </a:xfrm>
+          <a:prstGeom prst="rect">
+            <a:avLst/>
+          </a:prstGeom>
+          <a:noFill/>
+          <a:ln/>
+        </p:spPr>
+        <p:txBody>
+          <a:bodyPr wrap="square" lIns="0" tIns="0" rIns="0" bIns="0" rtlCol="0" anchor="ctr"/>
+          <a:lstStyle/>
+          <a:p>
+            <a:pPr marL="0" indent="0">
+              <a:buNone/>
+            </a:pPr>
+            <a:r>
+              <a:rPr lang="en-US" sz="1300" b="1" dirty="0">
+                <a:solidFill>
+                  <a:srgbClr val="12233A"/>
+                </a:solidFill>
+                <a:latin typeface="Courier New" pitchFamily="34" charset="0"/>
+                <a:ea typeface="Courier New" pitchFamily="34" charset="-122"/>
+                <a:cs typeface="Courier New" pitchFamily="34" charset="-120"/>
+              </a:rPr>
+              <a:t>0.0</a:t>
+            </a:r>
+            <a:endParaRPr lang="en-US" sz="1300" dirty="0"/>
+          </a:p>
+        </p:txBody>
+      </p:sp>
+      <p:sp>
+        <p:nvSpPr>
+          <p:cNvPr id="25" name="Shape 23"/>
+          <p:cNvSpPr/>
+          <p:nvPr/>
+        </p:nvSpPr>
+        <p:spPr>
+          <a:xfrm>
+            <a:off x="6446520" y="3010590"/>
+            <a:ext cx="4818888" cy="0"/>
+          </a:xfrm>
+          <a:prstGeom prst="line">
+            <a:avLst/>
+          </a:prstGeom>
+          <a:noFill/>
+          <a:ln w="12700">
+            <a:solidFill>
+              <a:srgbClr val="DFE5EB"/>
+            </a:solidFill>
+            <a:prstDash val="solid"/>
+          </a:ln>
+        </p:spPr>
+        <p:txBody>
+          <a:bodyPr/>
+          <a:lstStyle/>
+          <a:p>
+            <a:endParaRPr lang="en-US"/>
+          </a:p>
+        </p:txBody>
+      </p:sp>
+      <p:sp>
+        <p:nvSpPr>
+          <p:cNvPr id="26" name="Text 24"/>
+          <p:cNvSpPr/>
+          <p:nvPr/>
+        </p:nvSpPr>
+        <p:spPr>
+          <a:xfrm>
+            <a:off x="6446520" y="3028047"/>
+            <a:ext cx="2331720" cy="349135"/>
+          </a:xfrm>
+          <a:prstGeom prst="rect">
+            <a:avLst/>
+          </a:prstGeom>
+          <a:noFill/>
+          <a:ln/>
+        </p:spPr>
+        <p:txBody>
+          <a:bodyPr wrap="square" lIns="0" tIns="0" rIns="0" bIns="0" rtlCol="0" anchor="ctr"/>
+          <a:lstStyle/>
+          <a:p>
+            <a:pPr marL="0" indent="0">
+              <a:buNone/>
+            </a:pPr>
+            <a:r>
+              <a:rPr lang="en-US" sz="1350" dirty="0">
+                <a:solidFill>
+                  <a:srgbClr val="62707F"/>
+                </a:solidFill>
+                <a:latin typeface="Calibri" pitchFamily="34" charset="0"/>
+                <a:ea typeface="Calibri" pitchFamily="34" charset="-122"/>
+                <a:cs typeface="Calibri" pitchFamily="34" charset="-120"/>
+              </a:rPr>
+              <a:t>Gradient clip</a:t>
+            </a:r>
+            <a:endParaRPr lang="en-US" sz="1350" dirty="0"/>
+          </a:p>
+        </p:txBody>
+      </p:sp>
+      <p:sp>
+        <p:nvSpPr>
+          <p:cNvPr id="27" name="Text 25"/>
+          <p:cNvSpPr/>
+          <p:nvPr/>
+        </p:nvSpPr>
+        <p:spPr>
+          <a:xfrm>
+            <a:off x="8778240" y="3028047"/>
+            <a:ext cx="2651760" cy="349135"/>
+          </a:xfrm>
+          <a:prstGeom prst="rect">
+            <a:avLst/>
+          </a:prstGeom>
+          <a:noFill/>
+          <a:ln/>
+        </p:spPr>
+        <p:txBody>
+          <a:bodyPr wrap="square" lIns="0" tIns="0" rIns="0" bIns="0" rtlCol="0" anchor="ctr"/>
+          <a:lstStyle/>
+          <a:p>
+            <a:pPr marL="0" indent="0">
+              <a:buNone/>
+            </a:pPr>
+            <a:r>
+              <a:rPr lang="en-US" sz="1300" b="1" dirty="0">
+                <a:solidFill>
+                  <a:srgbClr val="12233A"/>
+                </a:solidFill>
+                <a:latin typeface="Courier New" pitchFamily="34" charset="0"/>
+                <a:ea typeface="Courier New" pitchFamily="34" charset="-122"/>
+                <a:cs typeface="Courier New" pitchFamily="34" charset="-120"/>
+              </a:rPr>
+              <a:t>1.0</a:t>
+            </a:r>
+            <a:endParaRPr lang="en-US" sz="1300" dirty="0"/>
+          </a:p>
+        </p:txBody>
+      </p:sp>
+      <p:sp>
+        <p:nvSpPr>
+          <p:cNvPr id="28" name="Shape 26"/>
+          <p:cNvSpPr/>
+          <p:nvPr/>
+        </p:nvSpPr>
+        <p:spPr>
+          <a:xfrm>
+            <a:off x="6446520" y="3394638"/>
+            <a:ext cx="4818888" cy="0"/>
+          </a:xfrm>
+          <a:prstGeom prst="line">
+            <a:avLst/>
+          </a:prstGeom>
+          <a:noFill/>
+          <a:ln w="12700">
+            <a:solidFill>
+              <a:srgbClr val="DFE5EB"/>
+            </a:solidFill>
+            <a:prstDash val="solid"/>
+          </a:ln>
+        </p:spPr>
+        <p:txBody>
+          <a:bodyPr/>
+          <a:lstStyle/>
+          <a:p>
+            <a:endParaRPr lang="en-US"/>
+          </a:p>
+        </p:txBody>
+      </p:sp>
+      <p:sp>
+        <p:nvSpPr>
+          <p:cNvPr id="29" name="Text 27"/>
+          <p:cNvSpPr/>
+          <p:nvPr/>
+        </p:nvSpPr>
+        <p:spPr>
+          <a:xfrm>
+            <a:off x="6446520" y="3412095"/>
+            <a:ext cx="2331720" cy="349135"/>
+          </a:xfrm>
+          <a:prstGeom prst="rect">
+            <a:avLst/>
+          </a:prstGeom>
+          <a:noFill/>
+          <a:ln/>
+        </p:spPr>
+        <p:txBody>
+          <a:bodyPr wrap="square" lIns="0" tIns="0" rIns="0" bIns="0" rtlCol="0" anchor="ctr"/>
+          <a:lstStyle/>
+          <a:p>
+            <a:pPr marL="0" indent="0">
+              <a:buNone/>
+            </a:pPr>
+            <a:r>
+              <a:rPr lang="en-US" sz="1350" dirty="0">
+                <a:solidFill>
+                  <a:srgbClr val="62707F"/>
+                </a:solidFill>
+                <a:latin typeface="Calibri" pitchFamily="34" charset="0"/>
+                <a:ea typeface="Calibri" pitchFamily="34" charset="-122"/>
+                <a:cs typeface="Calibri" pitchFamily="34" charset="-120"/>
+              </a:rPr>
+              <a:t>Hidden size / layers</a:t>
+            </a:r>
+            <a:endParaRPr lang="en-US" sz="1350" dirty="0"/>
+          </a:p>
+        </p:txBody>
+      </p:sp>
+      <p:sp>
+        <p:nvSpPr>
+          <p:cNvPr id="30" name="Text 28"/>
+          <p:cNvSpPr/>
+          <p:nvPr/>
+        </p:nvSpPr>
+        <p:spPr>
+          <a:xfrm>
+            <a:off x="8778240" y="3412095"/>
+            <a:ext cx="2651760" cy="349135"/>
+          </a:xfrm>
+          <a:prstGeom prst="rect">
+            <a:avLst/>
+          </a:prstGeom>
+          <a:noFill/>
+          <a:ln/>
+        </p:spPr>
+        <p:txBody>
+          <a:bodyPr wrap="square" lIns="0" tIns="0" rIns="0" bIns="0" rtlCol="0" anchor="ctr"/>
+          <a:lstStyle/>
+          <a:p>
+            <a:r>
+              <a:rPr lang="en-US" sz="1200" b="1" dirty="0">
+                <a:solidFill>
+                  <a:srgbClr val="12233A"/>
+                </a:solidFill>
+                <a:latin typeface="Courier New" pitchFamily="34" charset="0"/>
+                <a:ea typeface="Courier New" pitchFamily="34" charset="-122"/>
+                <a:cs typeface="Courier New" pitchFamily="34" charset="-120"/>
+              </a:rPr>
+              <a:t>[Hyperparameter]</a:t>
+            </a:r>
+            <a:endParaRPr lang="en-US" sz="1200" dirty="0"/>
+          </a:p>
+        </p:txBody>
+      </p:sp>
+      <p:sp>
+        <p:nvSpPr>
+          <p:cNvPr id="31" name="Shape 29"/>
+          <p:cNvSpPr/>
+          <p:nvPr/>
+        </p:nvSpPr>
+        <p:spPr>
+          <a:xfrm>
+            <a:off x="6446520" y="3778686"/>
+            <a:ext cx="4818888" cy="0"/>
+          </a:xfrm>
+          <a:prstGeom prst="line">
+            <a:avLst/>
+          </a:prstGeom>
+          <a:noFill/>
+          <a:ln w="12700">
+            <a:solidFill>
+              <a:srgbClr val="DFE5EB"/>
+            </a:solidFill>
+            <a:prstDash val="solid"/>
+          </a:ln>
+        </p:spPr>
+        <p:txBody>
+          <a:bodyPr/>
+          <a:lstStyle/>
+          <a:p>
+            <a:endParaRPr lang="en-US"/>
+          </a:p>
+        </p:txBody>
+      </p:sp>
+      <p:sp>
+        <p:nvSpPr>
+          <p:cNvPr id="32" name="Text 30"/>
+          <p:cNvSpPr/>
+          <p:nvPr/>
+        </p:nvSpPr>
+        <p:spPr>
+          <a:xfrm>
+            <a:off x="6446520" y="3796143"/>
+            <a:ext cx="2331720" cy="349135"/>
+          </a:xfrm>
+          <a:prstGeom prst="rect">
+            <a:avLst/>
+          </a:prstGeom>
+          <a:noFill/>
+          <a:ln/>
+        </p:spPr>
+        <p:txBody>
+          <a:bodyPr wrap="square" lIns="0" tIns="0" rIns="0" bIns="0" rtlCol="0" anchor="ctr"/>
+          <a:lstStyle/>
+          <a:p>
+            <a:pPr marL="0" indent="0">
+              <a:buNone/>
+            </a:pPr>
+            <a:r>
+              <a:rPr lang="en-US" sz="1350" dirty="0">
+                <a:solidFill>
+                  <a:srgbClr val="62707F"/>
+                </a:solidFill>
+                <a:latin typeface="Calibri" pitchFamily="34" charset="0"/>
+                <a:ea typeface="Calibri" pitchFamily="34" charset="-122"/>
+                <a:cs typeface="Calibri" pitchFamily="34" charset="-120"/>
+              </a:rPr>
+              <a:t>Dropout</a:t>
+            </a:r>
+            <a:endParaRPr lang="en-US" sz="1350" dirty="0"/>
+          </a:p>
+        </p:txBody>
+      </p:sp>
+      <p:sp>
+        <p:nvSpPr>
+          <p:cNvPr id="33" name="Text 31"/>
+          <p:cNvSpPr/>
+          <p:nvPr/>
+        </p:nvSpPr>
+        <p:spPr>
+          <a:xfrm>
+            <a:off x="8778240" y="3796143"/>
+            <a:ext cx="2651760" cy="349135"/>
+          </a:xfrm>
+          <a:prstGeom prst="rect">
+            <a:avLst/>
+          </a:prstGeom>
+          <a:noFill/>
+          <a:ln/>
+        </p:spPr>
+        <p:txBody>
+          <a:bodyPr wrap="square" lIns="0" tIns="0" rIns="0" bIns="0" rtlCol="0" anchor="ctr"/>
+          <a:lstStyle/>
+          <a:p>
+            <a:r>
+              <a:rPr lang="en-US" sz="1200" b="1" dirty="0">
+                <a:solidFill>
+                  <a:srgbClr val="12233A"/>
+                </a:solidFill>
+                <a:latin typeface="Courier New" pitchFamily="34" charset="0"/>
+                <a:ea typeface="Courier New" pitchFamily="34" charset="-122"/>
+                <a:cs typeface="Courier New" pitchFamily="34" charset="-120"/>
+              </a:rPr>
+              <a:t>[Hyperparameter]</a:t>
+            </a:r>
+            <a:endParaRPr lang="en-US" sz="1200" dirty="0"/>
+          </a:p>
+        </p:txBody>
+      </p:sp>
+      <p:sp>
+        <p:nvSpPr>
+          <p:cNvPr id="34" name="Shape 32"/>
+          <p:cNvSpPr/>
+          <p:nvPr/>
+        </p:nvSpPr>
+        <p:spPr>
+          <a:xfrm>
+            <a:off x="6446520" y="4162734"/>
+            <a:ext cx="4818888" cy="0"/>
+          </a:xfrm>
+          <a:prstGeom prst="line">
+            <a:avLst/>
+          </a:prstGeom>
+          <a:noFill/>
+          <a:ln w="12700">
+            <a:solidFill>
+              <a:srgbClr val="DFE5EB"/>
+            </a:solidFill>
+            <a:prstDash val="solid"/>
+          </a:ln>
+        </p:spPr>
+        <p:txBody>
+          <a:bodyPr/>
+          <a:lstStyle/>
+          <a:p>
+            <a:endParaRPr lang="en-US"/>
+          </a:p>
+        </p:txBody>
+      </p:sp>
+      <p:sp>
+        <p:nvSpPr>
+          <p:cNvPr id="35" name="Text 33"/>
+          <p:cNvSpPr/>
+          <p:nvPr/>
+        </p:nvSpPr>
+        <p:spPr>
+          <a:xfrm>
+            <a:off x="6446520" y="4180191"/>
+            <a:ext cx="2331720" cy="349135"/>
+          </a:xfrm>
+          <a:prstGeom prst="rect">
+            <a:avLst/>
+          </a:prstGeom>
+          <a:noFill/>
+          <a:ln/>
+        </p:spPr>
+        <p:txBody>
+          <a:bodyPr wrap="square" lIns="0" tIns="0" rIns="0" bIns="0" rtlCol="0" anchor="ctr"/>
+          <a:lstStyle/>
+          <a:p>
+            <a:pPr marL="0" indent="0">
+              <a:buNone/>
+            </a:pPr>
+            <a:r>
+              <a:rPr lang="en-US" sz="1350" dirty="0">
+                <a:solidFill>
+                  <a:srgbClr val="62707F"/>
+                </a:solidFill>
+                <a:latin typeface="Calibri" pitchFamily="34" charset="0"/>
+                <a:ea typeface="Calibri" pitchFamily="34" charset="-122"/>
+                <a:cs typeface="Calibri" pitchFamily="34" charset="-120"/>
+              </a:rPr>
+              <a:t>Batch size</a:t>
+            </a:r>
+            <a:endParaRPr lang="en-US" sz="1350" dirty="0"/>
+          </a:p>
+        </p:txBody>
+      </p:sp>
+      <p:sp>
+        <p:nvSpPr>
+          <p:cNvPr id="36" name="Text 34"/>
+          <p:cNvSpPr/>
+          <p:nvPr/>
+        </p:nvSpPr>
+        <p:spPr>
+          <a:xfrm>
+            <a:off x="8778240" y="4180191"/>
+            <a:ext cx="2651760" cy="349135"/>
+          </a:xfrm>
+          <a:prstGeom prst="rect">
+            <a:avLst/>
+          </a:prstGeom>
+          <a:noFill/>
+          <a:ln/>
+        </p:spPr>
+        <p:txBody>
+          <a:bodyPr wrap="square" lIns="0" tIns="0" rIns="0" bIns="0" rtlCol="0" anchor="ctr"/>
+          <a:lstStyle/>
+          <a:p>
+            <a:pPr marL="0" indent="0">
+              <a:buNone/>
+            </a:pPr>
+            <a:r>
+              <a:rPr lang="en-US" sz="1300" b="1" dirty="0">
+                <a:solidFill>
+                  <a:srgbClr val="12233A"/>
+                </a:solidFill>
+                <a:latin typeface="Courier New" pitchFamily="34" charset="0"/>
+                <a:ea typeface="Courier New" pitchFamily="34" charset="-122"/>
+                <a:cs typeface="Courier New" pitchFamily="34" charset="-120"/>
+              </a:rPr>
+              <a:t>8</a:t>
+            </a:r>
+            <a:endParaRPr lang="en-US" sz="1300" dirty="0"/>
+          </a:p>
+        </p:txBody>
+      </p:sp>
+      <p:sp>
+        <p:nvSpPr>
+          <p:cNvPr id="37" name="Shape 35"/>
+          <p:cNvSpPr/>
+          <p:nvPr/>
+        </p:nvSpPr>
+        <p:spPr>
+          <a:xfrm>
+            <a:off x="6446520" y="4546782"/>
+            <a:ext cx="4818888" cy="0"/>
+          </a:xfrm>
+          <a:prstGeom prst="line">
+            <a:avLst/>
+          </a:prstGeom>
+          <a:noFill/>
+          <a:ln w="12700">
+            <a:solidFill>
+              <a:srgbClr val="DFE5EB"/>
+            </a:solidFill>
+            <a:prstDash val="solid"/>
+          </a:ln>
+        </p:spPr>
+        <p:txBody>
+          <a:bodyPr/>
+          <a:lstStyle/>
+          <a:p>
+            <a:endParaRPr lang="en-US"/>
+          </a:p>
+        </p:txBody>
+      </p:sp>
+      <p:sp>
+        <p:nvSpPr>
+          <p:cNvPr id="38" name="Text 36"/>
+          <p:cNvSpPr/>
+          <p:nvPr/>
+        </p:nvSpPr>
+        <p:spPr>
+          <a:xfrm>
+            <a:off x="6446520" y="4564239"/>
+            <a:ext cx="2331720" cy="349135"/>
+          </a:xfrm>
+          <a:prstGeom prst="rect">
+            <a:avLst/>
+          </a:prstGeom>
+          <a:noFill/>
+          <a:ln/>
+        </p:spPr>
+        <p:txBody>
+          <a:bodyPr wrap="square" lIns="0" tIns="0" rIns="0" bIns="0" rtlCol="0" anchor="ctr"/>
+          <a:lstStyle/>
+          <a:p>
+            <a:pPr marL="0" indent="0">
+              <a:buNone/>
+            </a:pPr>
+            <a:r>
+              <a:rPr lang="en-US" sz="1350" dirty="0">
+                <a:solidFill>
+                  <a:srgbClr val="62707F"/>
+                </a:solidFill>
+                <a:latin typeface="Calibri" pitchFamily="34" charset="0"/>
+                <a:ea typeface="Calibri" pitchFamily="34" charset="-122"/>
+                <a:cs typeface="Calibri" pitchFamily="34" charset="-120"/>
+              </a:rPr>
+              <a:t>Epochs</a:t>
+            </a:r>
+            <a:endParaRPr lang="en-US" sz="1350" dirty="0"/>
+          </a:p>
+        </p:txBody>
+      </p:sp>
+      <p:sp>
+        <p:nvSpPr>
+          <p:cNvPr id="39" name="Text 37"/>
+          <p:cNvSpPr/>
+          <p:nvPr/>
+        </p:nvSpPr>
+        <p:spPr>
+          <a:xfrm>
+            <a:off x="8778240" y="4564239"/>
+            <a:ext cx="2651760" cy="349135"/>
+          </a:xfrm>
+          <a:prstGeom prst="rect">
+            <a:avLst/>
+          </a:prstGeom>
+          <a:noFill/>
+          <a:ln/>
+        </p:spPr>
+        <p:txBody>
+          <a:bodyPr wrap="square" lIns="0" tIns="0" rIns="0" bIns="0" rtlCol="0" anchor="ctr"/>
+          <a:lstStyle/>
+          <a:p>
+            <a:pPr marL="0" indent="0">
+              <a:buNone/>
+            </a:pPr>
+            <a:r>
+              <a:rPr lang="en-US" sz="1300" b="1" dirty="0">
+                <a:solidFill>
+                  <a:srgbClr val="12233A"/>
+                </a:solidFill>
+                <a:latin typeface="Courier New" pitchFamily="34" charset="0"/>
+                <a:cs typeface="Courier New" pitchFamily="34" charset="-120"/>
+              </a:rPr>
+              <a:t>64 – stop at overfit</a:t>
+            </a:r>
+            <a:endParaRPr lang="en-US" sz="1300" dirty="0"/>
+          </a:p>
+        </p:txBody>
+      </p:sp>
+      <p:sp>
+        <p:nvSpPr>
+          <p:cNvPr id="40" name="Shape 38"/>
+          <p:cNvSpPr/>
+          <p:nvPr/>
+        </p:nvSpPr>
+        <p:spPr>
+          <a:xfrm>
+            <a:off x="6446520" y="4930830"/>
+            <a:ext cx="4818888" cy="0"/>
+          </a:xfrm>
+          <a:prstGeom prst="line">
+            <a:avLst/>
+          </a:prstGeom>
+          <a:noFill/>
+          <a:ln w="12700">
+            <a:solidFill>
+              <a:srgbClr val="DFE5EB"/>
+            </a:solidFill>
+            <a:prstDash val="solid"/>
+          </a:ln>
+        </p:spPr>
+        <p:txBody>
+          <a:bodyPr/>
+          <a:lstStyle/>
+          <a:p>
+            <a:endParaRPr lang="en-US"/>
+          </a:p>
+        </p:txBody>
+      </p:sp>
+      <p:sp>
+        <p:nvSpPr>
+          <p:cNvPr id="41" name="Text 39"/>
+          <p:cNvSpPr/>
+          <p:nvPr/>
+        </p:nvSpPr>
+        <p:spPr>
+          <a:xfrm>
+            <a:off x="6446520" y="4948287"/>
+            <a:ext cx="2331720" cy="349135"/>
+          </a:xfrm>
+          <a:prstGeom prst="rect">
+            <a:avLst/>
+          </a:prstGeom>
+          <a:noFill/>
+          <a:ln/>
+        </p:spPr>
+        <p:txBody>
+          <a:bodyPr wrap="square" lIns="0" tIns="0" rIns="0" bIns="0" rtlCol="0" anchor="ctr"/>
+          <a:lstStyle/>
+          <a:p>
+            <a:pPr marL="0" indent="0">
+              <a:buNone/>
+            </a:pPr>
+            <a:r>
+              <a:rPr lang="en-US" sz="1350" dirty="0">
+                <a:solidFill>
+                  <a:srgbClr val="62707F"/>
+                </a:solidFill>
+                <a:latin typeface="Calibri" pitchFamily="34" charset="0"/>
+                <a:ea typeface="Calibri" pitchFamily="34" charset="-122"/>
+                <a:cs typeface="Calibri" pitchFamily="34" charset="-120"/>
+              </a:rPr>
+              <a:t>Checkpoint on</a:t>
+            </a:r>
+            <a:endParaRPr lang="en-US" sz="1350" dirty="0"/>
+          </a:p>
+        </p:txBody>
+      </p:sp>
+      <p:sp>
+        <p:nvSpPr>
+          <p:cNvPr id="42" name="Text 40"/>
+          <p:cNvSpPr/>
+          <p:nvPr/>
+        </p:nvSpPr>
+        <p:spPr>
+          <a:xfrm>
+            <a:off x="8778240" y="4948287"/>
+            <a:ext cx="2651760" cy="349135"/>
+          </a:xfrm>
+          <a:prstGeom prst="rect">
+            <a:avLst/>
+          </a:prstGeom>
+          <a:noFill/>
+          <a:ln/>
+        </p:spPr>
+        <p:txBody>
+          <a:bodyPr wrap="square" lIns="0" tIns="0" rIns="0" bIns="0" rtlCol="0" anchor="ctr"/>
+          <a:lstStyle/>
+          <a:p>
+            <a:pPr marL="0" indent="0">
+              <a:buNone/>
+            </a:pPr>
+            <a:r>
+              <a:rPr lang="en-US" sz="1300" b="1" dirty="0">
+                <a:solidFill>
+                  <a:srgbClr val="12233A"/>
+                </a:solidFill>
+                <a:latin typeface="Courier New" pitchFamily="34" charset="0"/>
+                <a:ea typeface="Courier New" pitchFamily="34" charset="-122"/>
+                <a:cs typeface="Courier New" pitchFamily="34" charset="-120"/>
+              </a:rPr>
+              <a:t>validation MSE</a:t>
+            </a:r>
+            <a:endParaRPr lang="en-US" sz="1300" dirty="0"/>
+          </a:p>
+        </p:txBody>
+      </p:sp>
+      <p:sp>
+        <p:nvSpPr>
+          <p:cNvPr id="43" name="Shape 18">
+            <a:extLst>
+              <a:ext uri="{FF2B5EF4-FFF2-40B4-BE49-F238E27FC236}">
+                <a16:creationId xmlns:a16="http://schemas.microsoft.com/office/drawing/2014/main" id="{1F75D08A-6BD0-8EF7-F31E-A65855C53F1C}"/>
+              </a:ext>
+            </a:extLst>
+          </p:cNvPr>
+          <p:cNvSpPr/>
+          <p:nvPr/>
+        </p:nvSpPr>
+        <p:spPr>
+          <a:xfrm>
+            <a:off x="652272" y="5591432"/>
+            <a:ext cx="10899648" cy="593320"/>
+          </a:xfrm>
+          <a:prstGeom prst="roundRect">
+            <a:avLst>
+              <a:gd name="adj" fmla="val 9474"/>
+            </a:avLst>
+          </a:prstGeom>
+          <a:solidFill>
+            <a:srgbClr val="12233A"/>
+          </a:solidFill>
+          <a:ln/>
           <a:effectLst>
             <a:outerShdw blurRad="101600" dist="12700" dir="5400000" algn="bl" rotWithShape="0">
               <a:srgbClr val="9AA7B4">
@@ -9111,155 +10152,20 @@
       </p:sp>
       <p:sp>
         <p:nvSpPr>
-          <p:cNvPr id="17" name="Shape 15"/>
-          <p:cNvSpPr/>
-          <p:nvPr/>
-        </p:nvSpPr>
-        <p:spPr>
-          <a:xfrm>
-            <a:off x="6492240" y="3520440"/>
-            <a:ext cx="274320" cy="274320"/>
-          </a:xfrm>
-          <a:prstGeom prst="ellipse">
-            <a:avLst/>
-          </a:prstGeom>
-          <a:solidFill>
-            <a:srgbClr val="E08A3C"/>
-          </a:solidFill>
-          <a:ln/>
-        </p:spPr>
-        <p:txBody>
-          <a:bodyPr/>
-          <a:lstStyle/>
-          <a:p>
-            <a:endParaRPr lang="en-US"/>
-          </a:p>
-        </p:txBody>
-      </p:sp>
-      <p:sp>
-        <p:nvSpPr>
-          <p:cNvPr id="18" name="Text 16"/>
-          <p:cNvSpPr/>
-          <p:nvPr/>
-        </p:nvSpPr>
-        <p:spPr>
-          <a:xfrm>
-            <a:off x="6894576" y="3447288"/>
-            <a:ext cx="4480560" cy="310896"/>
-          </a:xfrm>
-          <a:prstGeom prst="rect">
-            <a:avLst/>
-          </a:prstGeom>
-          <a:noFill/>
-          <a:ln/>
-        </p:spPr>
-        <p:txBody>
-          <a:bodyPr wrap="square" lIns="0" tIns="0" rIns="0" bIns="0" rtlCol="0" anchor="ctr"/>
-          <a:lstStyle/>
-          <a:p>
-            <a:pPr marL="0" indent="0">
-              <a:buNone/>
-            </a:pPr>
-            <a:r>
-              <a:rPr lang="en-US" sz="1400" b="1" dirty="0">
-                <a:solidFill>
-                  <a:srgbClr val="12233A"/>
-                </a:solidFill>
-                <a:latin typeface="Calibri" pitchFamily="34" charset="0"/>
-                <a:ea typeface="Calibri" pitchFamily="34" charset="-122"/>
-                <a:cs typeface="Calibri" pitchFamily="34" charset="-120"/>
-              </a:rPr>
-              <a:t>Optimization metric - Validation loss</a:t>
-            </a:r>
-            <a:endParaRPr lang="en-US" sz="1400" dirty="0"/>
-          </a:p>
-        </p:txBody>
-      </p:sp>
-      <p:sp>
-        <p:nvSpPr>
-          <p:cNvPr id="19" name="Text 17"/>
-          <p:cNvSpPr/>
-          <p:nvPr/>
-        </p:nvSpPr>
-        <p:spPr>
-          <a:xfrm>
-            <a:off x="6894576" y="3794760"/>
-            <a:ext cx="4480560" cy="749808"/>
-          </a:xfrm>
-          <a:prstGeom prst="rect">
-            <a:avLst/>
-          </a:prstGeom>
-          <a:noFill/>
-          <a:ln/>
-        </p:spPr>
-        <p:txBody>
-          <a:bodyPr wrap="square" lIns="0" tIns="0" rIns="0" bIns="0" rtlCol="0" anchor="t"/>
-          <a:lstStyle/>
-          <a:p>
-            <a:pPr marL="0" indent="0">
-              <a:buNone/>
-            </a:pPr>
-            <a:r>
-              <a:rPr lang="en-US" sz="1300" dirty="0">
-                <a:solidFill>
-                  <a:srgbClr val="62707F"/>
-                </a:solidFill>
-                <a:latin typeface="Calibri" pitchFamily="34" charset="0"/>
-                <a:ea typeface="Calibri" pitchFamily="34" charset="-122"/>
-                <a:cs typeface="Calibri" pitchFamily="34" charset="-120"/>
-              </a:rPr>
-              <a:t>Short runs pick the hyperparameters. Then retrain.</a:t>
-            </a:r>
-            <a:endParaRPr lang="en-US" sz="1300" dirty="0"/>
-          </a:p>
-        </p:txBody>
-      </p:sp>
-      <p:sp>
-        <p:nvSpPr>
-          <p:cNvPr id="20" name="Shape 18"/>
-          <p:cNvSpPr/>
-          <p:nvPr/>
-        </p:nvSpPr>
-        <p:spPr>
-          <a:xfrm>
-            <a:off x="640080" y="4937760"/>
-            <a:ext cx="10899648" cy="868680"/>
-          </a:xfrm>
-          <a:prstGeom prst="roundRect">
-            <a:avLst>
-              <a:gd name="adj" fmla="val 9474"/>
-            </a:avLst>
-          </a:prstGeom>
-          <a:solidFill>
-            <a:srgbClr val="12233A"/>
-          </a:solidFill>
-          <a:ln/>
-          <a:effectLst>
-            <a:outerShdw blurRad="101600" dist="12700" dir="5400000" algn="bl" rotWithShape="0">
-              <a:srgbClr val="9AA7B4">
-                <a:alpha val="18000"/>
-              </a:srgbClr>
-            </a:outerShdw>
-          </a:effectLst>
-        </p:spPr>
-        <p:txBody>
-          <a:bodyPr/>
-          <a:lstStyle/>
-          <a:p>
-            <a:endParaRPr lang="en-US"/>
-          </a:p>
-        </p:txBody>
-      </p:sp>
-      <p:sp>
-        <p:nvSpPr>
-          <p:cNvPr id="21" name="Text 19"/>
-          <p:cNvSpPr/>
-          <p:nvPr/>
-        </p:nvSpPr>
-        <p:spPr>
-          <a:xfrm>
-            <a:off x="914400" y="4937760"/>
-            <a:ext cx="10332720" cy="868680"/>
+          <p:cNvPr id="44" name="Text 19">
+            <a:extLst>
+              <a:ext uri="{FF2B5EF4-FFF2-40B4-BE49-F238E27FC236}">
+                <a16:creationId xmlns:a16="http://schemas.microsoft.com/office/drawing/2014/main" id="{ECABD144-93CB-E514-3A80-86F4C193F14D}"/>
+              </a:ext>
+            </a:extLst>
+          </p:cNvPr>
+          <p:cNvSpPr/>
+          <p:nvPr/>
+        </p:nvSpPr>
+        <p:spPr>
+          <a:xfrm>
+            <a:off x="926592" y="5591432"/>
+            <a:ext cx="10332720" cy="593320"/>
           </a:xfrm>
           <a:prstGeom prst="rect">
             <a:avLst/>
@@ -9449,7 +10355,7 @@
                 <a:ea typeface="Calibri" pitchFamily="34" charset="-122"/>
                 <a:cs typeface="Calibri" pitchFamily="34" charset="-120"/>
               </a:rPr>
-              <a:t>STAGE 4: TUNING</a:t>
+              <a:t>TUNING</a:t>
             </a:r>
             <a:endParaRPr lang="en-US" sz="1150" dirty="0"/>
           </a:p>
@@ -9673,7 +10579,7 @@
                 <a:ea typeface="Calibri" pitchFamily="34" charset="-122"/>
                 <a:cs typeface="Calibri" pitchFamily="34" charset="-120"/>
               </a:rPr>
-              <a:t>List values in the config. Take every combination.</a:t>
+              <a:t>List values in the config. Take every combination. 2^4 = 16</a:t>
             </a:r>
             <a:endParaRPr lang="en-US" sz="1300" dirty="0"/>
           </a:p>
@@ -9885,7 +10791,7 @@
                 <a:ea typeface="Calibri" pitchFamily="34" charset="-122"/>
                 <a:cs typeface="Calibri" pitchFamily="34" charset="-120"/>
               </a:rPr>
-              <a:t>Train each combination for 3 epochs, not 25.</a:t>
+              <a:t>Train each combination for 3 epochs, not 25 to see the general direction of improvement.</a:t>
             </a:r>
             <a:endParaRPr lang="en-US" sz="1300" dirty="0"/>
           </a:p>
@@ -11766,7 +12672,7 @@
                 <a:ea typeface="Calibri" pitchFamily="34" charset="-122"/>
                 <a:cs typeface="Calibri" pitchFamily="34" charset="-120"/>
               </a:rPr>
-              <a:t>Most of the gain arrives in five epochs.</a:t>
+              <a:t>Most of the gain is from first five epochs.</a:t>
             </a:r>
             <a:endParaRPr lang="en-US" sz="1400" dirty="0"/>
           </a:p>
@@ -11789,16 +12695,10 @@
               </a:rPr>
               <a:t>Train and validation stay together.</a:t>
             </a:r>
-            <a:endParaRPr lang="en-US" sz="1400" dirty="0"/>
-          </a:p>
-          <a:p>
-            <a:pPr marL="342900" indent="-342900">
-              <a:spcAft>
-                <a:spcPts val="1200"/>
-              </a:spcAft>
-              <a:buSzPct val="100000"/>
-              <a:buChar char="•"/>
-            </a:pPr>
+            <a:r>
+              <a:rPr lang="en-US" sz="1400" dirty="0"/>
+              <a:t> =&gt; </a:t>
+            </a:r>
             <a:r>
               <a:rPr lang="en-US" sz="1400" dirty="0">
                 <a:solidFill>
@@ -11808,7 +12708,7 @@
                 <a:ea typeface="Calibri" pitchFamily="34" charset="-122"/>
                 <a:cs typeface="Calibri" pitchFamily="34" charset="-120"/>
               </a:rPr>
-              <a:t>No overfitting, even on new speakers.</a:t>
+              <a:t>No overfitting, even when compared to new speakers.</a:t>
             </a:r>
           </a:p>
           <a:p>
@@ -28480,7 +29380,7 @@
                 <a:latin typeface="Calibri" pitchFamily="34" charset="0"/>
                 <a:cs typeface="Calibri" pitchFamily="34" charset="-120"/>
               </a:rPr>
-              <a:t>DATAPATH + THE MODEL</a:t>
+              <a:t>PIPELINE</a:t>
             </a:r>
             <a:endParaRPr lang="en-US" sz="1150" dirty="0"/>
           </a:p>
@@ -29741,7 +30641,7 @@
               <a:buNone/>
             </a:pPr>
             <a:r>
-              <a:rPr lang="en-US" sz="1250" dirty="0">
+              <a:rPr lang="en-US" sz="1200" dirty="0">
                 <a:solidFill>
                   <a:srgbClr val="16202C"/>
                 </a:solidFill>
@@ -29749,9 +30649,31 @@
                 <a:ea typeface="Calibri" pitchFamily="34" charset="-122"/>
                 <a:cs typeface="Calibri" pitchFamily="34" charset="-120"/>
               </a:rPr>
-              <a:t>Linear → Sigmoid, scaled by mask_max</a:t>
+              <a:t>Linear → Sigmoid, scaled by </a:t>
             </a:r>
-            <a:endParaRPr lang="en-US" sz="1250" dirty="0"/>
+            <a:r>
+              <a:rPr lang="en-US" sz="1200" dirty="0" err="1">
+                <a:solidFill>
+                  <a:srgbClr val="16202C"/>
+                </a:solidFill>
+                <a:latin typeface="Calibri" pitchFamily="34" charset="0"/>
+                <a:ea typeface="Calibri" pitchFamily="34" charset="-122"/>
+                <a:cs typeface="Calibri" pitchFamily="34" charset="-120"/>
+              </a:rPr>
+              <a:t>mask_max</a:t>
+            </a:r>
+            <a:r>
+              <a:rPr lang="en-US" sz="1200" dirty="0">
+                <a:solidFill>
+                  <a:srgbClr val="16202C"/>
+                </a:solidFill>
+                <a:latin typeface="Calibri" pitchFamily="34" charset="0"/>
+                <a:ea typeface="Calibri" pitchFamily="34" charset="-122"/>
+                <a:cs typeface="Calibri" pitchFamily="34" charset="-120"/>
+              </a:rPr>
+              <a:t>. Each freq. bin judged separately</a:t>
+            </a:r>
+            <a:endParaRPr lang="en-US" sz="1200" dirty="0"/>
           </a:p>
         </p:txBody>
       </p:sp>
@@ -29893,120 +30815,36 @@
           </a:p>
         </p:txBody>
       </p:sp>
-      <p:sp>
-        <p:nvSpPr>
-          <p:cNvPr id="43" name="Shape 41"/>
-          <p:cNvSpPr/>
-          <p:nvPr/>
-        </p:nvSpPr>
-        <p:spPr>
-          <a:xfrm>
-            <a:off x="7772400" y="3429000"/>
-            <a:ext cx="3767328" cy="2212848"/>
-          </a:xfrm>
-          <a:prstGeom prst="roundRect">
-            <a:avLst>
-              <a:gd name="adj" fmla="val 3719"/>
-            </a:avLst>
-          </a:prstGeom>
-          <a:solidFill>
-            <a:srgbClr val="E3F2F2"/>
-          </a:solidFill>
-          <a:ln/>
-          <a:effectLst>
-            <a:outerShdw blurRad="101600" dist="12700" dir="5400000" algn="bl" rotWithShape="0">
-              <a:srgbClr val="9AA7B4">
-                <a:alpha val="18000"/>
-              </a:srgbClr>
-            </a:outerShdw>
-          </a:effectLst>
-        </p:spPr>
-        <p:txBody>
-          <a:bodyPr/>
-          <a:lstStyle/>
-          <a:p>
-            <a:endParaRPr lang="en-US"/>
-          </a:p>
-        </p:txBody>
-      </p:sp>
-      <p:sp>
-        <p:nvSpPr>
-          <p:cNvPr id="44" name="Text 42"/>
-          <p:cNvSpPr/>
-          <p:nvPr/>
-        </p:nvSpPr>
-        <p:spPr>
-          <a:xfrm>
-            <a:off x="8028432" y="3611880"/>
-            <a:ext cx="3255264" cy="274320"/>
+      <p:pic>
+        <p:nvPicPr>
+          <p:cNvPr id="46" name="Picture 45" descr="Sigmoid function | Formula, Derivative, &amp; Machine Learning | Britannica">
+            <a:extLst>
+              <a:ext uri="{FF2B5EF4-FFF2-40B4-BE49-F238E27FC236}">
+                <a16:creationId xmlns:a16="http://schemas.microsoft.com/office/drawing/2014/main" id="{8EEE3511-6170-BF80-7DB7-6DD141C3ABBE}"/>
+              </a:ext>
+            </a:extLst>
+          </p:cNvPr>
+          <p:cNvPicPr>
+            <a:picLocks noChangeAspect="1"/>
+          </p:cNvPicPr>
+          <p:nvPr/>
+        </p:nvPicPr>
+        <p:blipFill>
+          <a:blip r:embed="rId3"/>
+          <a:stretch>
+            <a:fillRect/>
+          </a:stretch>
+        </p:blipFill>
+        <p:spPr>
+          <a:xfrm>
+            <a:off x="7367018" y="3233635"/>
+            <a:ext cx="4568646" cy="3353386"/>
           </a:xfrm>
           <a:prstGeom prst="rect">
             <a:avLst/>
           </a:prstGeom>
-          <a:noFill/>
-          <a:ln/>
-        </p:spPr>
-        <p:txBody>
-          <a:bodyPr wrap="square" lIns="0" tIns="0" rIns="0" bIns="0" rtlCol="0" anchor="ctr"/>
-          <a:lstStyle/>
-          <a:p>
-            <a:pPr marL="0" indent="0">
-              <a:buNone/>
-            </a:pPr>
-            <a:r>
-              <a:rPr lang="en-US" sz="1250" b="1" dirty="0">
-                <a:solidFill>
-                  <a:srgbClr val="12233A"/>
-                </a:solidFill>
-                <a:latin typeface="Calibri" pitchFamily="34" charset="0"/>
-                <a:ea typeface="Calibri" pitchFamily="34" charset="-122"/>
-                <a:cs typeface="Calibri" pitchFamily="34" charset="-120"/>
-              </a:rPr>
-              <a:t>Mask or magnitude</a:t>
-            </a:r>
-            <a:endParaRPr lang="en-US" sz="1250" dirty="0"/>
-          </a:p>
-        </p:txBody>
-      </p:sp>
-      <p:sp>
-        <p:nvSpPr>
-          <p:cNvPr id="45" name="Text 43"/>
-          <p:cNvSpPr/>
-          <p:nvPr/>
-        </p:nvSpPr>
-        <p:spPr>
-          <a:xfrm>
-            <a:off x="8028432" y="3950208"/>
-            <a:ext cx="3255264" cy="1554480"/>
-          </a:xfrm>
-          <a:prstGeom prst="rect">
-            <a:avLst/>
-          </a:prstGeom>
-          <a:noFill/>
-          <a:ln/>
-        </p:spPr>
-        <p:txBody>
-          <a:bodyPr wrap="square" lIns="0" tIns="0" rIns="0" bIns="0" rtlCol="0" anchor="t"/>
-          <a:lstStyle/>
-          <a:p>
-            <a:pPr marL="0" indent="0">
-              <a:buNone/>
-            </a:pPr>
-            <a:r>
-              <a:rPr lang="en-US" sz="1300" dirty="0">
-                <a:solidFill>
-                  <a:srgbClr val="12233A"/>
-                </a:solidFill>
-                <a:latin typeface="Calibri" pitchFamily="34" charset="0"/>
-                <a:ea typeface="Calibri" pitchFamily="34" charset="-122"/>
-                <a:cs typeface="Calibri" pitchFamily="34" charset="-120"/>
-              </a:rPr>
-              <a:t>The sigmoid head predicts a gain from 0 to 1. The softplus head predicts the magnitude. The mask is easier to learn.</a:t>
-            </a:r>
-            <a:endParaRPr lang="en-US" sz="1300" dirty="0"/>
-          </a:p>
-        </p:txBody>
-      </p:sp>
+        </p:spPr>
+      </p:pic>
     </p:spTree>
   </p:cSld>
   <p:clrMapOvr>
@@ -31324,7 +32162,7 @@
                 <a:ea typeface="Calibri" pitchFamily="34" charset="-122"/>
                 <a:cs typeface="Calibri" pitchFamily="34" charset="-120"/>
               </a:rPr>
-              <a:t>EVALUATION</a:t>
+              <a:t>VALIDATION</a:t>
             </a:r>
             <a:endParaRPr lang="en-US" sz="1150" dirty="0"/>
           </a:p>

--- a/PRESENTATION_Skylar_LSTM.pptx
+++ b/PRESENTATION_Skylar_LSTM.pptx
@@ -21968,7 +21968,7 @@
         </p:nvSpPr>
         <p:spPr>
           <a:xfrm>
-            <a:off x="777240" y="5349240"/>
+            <a:off x="2436876" y="4606929"/>
             <a:ext cx="7315200" cy="320040"/>
           </a:xfrm>
           <a:prstGeom prst="rect">
@@ -21981,11 +21981,11 @@
           <a:bodyPr wrap="square" lIns="0" tIns="0" rIns="0" bIns="0" rtlCol="0" anchor="ctr"/>
           <a:lstStyle/>
           <a:p>
-            <a:pPr marL="0" indent="0">
+            <a:pPr marL="0" indent="0" algn="ctr">
               <a:buNone/>
             </a:pPr>
             <a:r>
-              <a:rPr lang="en-US" sz="1150" dirty="0">
+              <a:rPr lang="en-US" dirty="0">
                 <a:solidFill>
                   <a:srgbClr val="8FA3B8"/>
                 </a:solidFill>
@@ -21993,9 +21993,31 @@
                 <a:ea typeface="Calibri" pitchFamily="34" charset="-122"/>
                 <a:cs typeface="Calibri" pitchFamily="34" charset="-120"/>
               </a:rPr>
-              <a:t>Skylar Denno  ·  EECE 5644  ·  github.com/skylar-slideshows/ML_denoise</a:t>
+              <a:t>Skylar Denno       </a:t>
             </a:r>
-            <a:endParaRPr lang="en-US" sz="1150" dirty="0"/>
+            <a:r>
+              <a:rPr lang="en-US" dirty="0" err="1">
+                <a:solidFill>
+                  <a:srgbClr val="8FA3B8"/>
+                </a:solidFill>
+                <a:latin typeface="Calibri" pitchFamily="34" charset="0"/>
+                <a:ea typeface="Calibri" pitchFamily="34" charset="-122"/>
+                <a:cs typeface="Calibri" pitchFamily="34" charset="-120"/>
+              </a:rPr>
+              <a:t>github.com</a:t>
+            </a:r>
+            <a:r>
+              <a:rPr lang="en-US" dirty="0">
+                <a:solidFill>
+                  <a:srgbClr val="8FA3B8"/>
+                </a:solidFill>
+                <a:latin typeface="Calibri" pitchFamily="34" charset="0"/>
+                <a:ea typeface="Calibri" pitchFamily="34" charset="-122"/>
+                <a:cs typeface="Calibri" pitchFamily="34" charset="-120"/>
+              </a:rPr>
+              <a:t>/skylar-slideshows/ML_denoise</a:t>
+            </a:r>
+            <a:endParaRPr lang="en-US" dirty="0"/>
           </a:p>
         </p:txBody>
       </p:sp>
@@ -22013,7 +22035,7 @@
         </p:nvSpPr>
         <p:spPr>
           <a:xfrm>
-            <a:off x="4890412" y="2490737"/>
+            <a:off x="2805107" y="2457069"/>
             <a:ext cx="6583680" cy="1188720"/>
           </a:xfrm>
           <a:prstGeom prst="rect">
@@ -22026,7 +22048,7 @@
           <a:bodyPr wrap="square" lIns="0" tIns="0" rIns="0" bIns="0" rtlCol="0" anchor="ctr"/>
           <a:lstStyle/>
           <a:p>
-            <a:pPr marL="0" indent="0">
+            <a:pPr marL="0" indent="0" algn="ctr">
               <a:lnSpc>
                 <a:spcPct val="110000"/>
               </a:lnSpc>
